--- a/balmaero_presentation.pptx
+++ b/balmaero_presentation.pptx
@@ -1348,7 +1348,7 @@
           </a:p>
           <a:p>
             <a:r>
-              <a:t>비주얼 디렉터와 카피라이터 에이전트가 병렬로 작동하여 커버 아트, 숏폼 영상, 피칭 텍스트를 완성합니다.</a:t>
+              <a:t>비주얼 디렉터, 카피라이터, 피칭, 에디토리얼 등 총 5종의 전문 에이전트가 병렬로 작동하여 커버 아트, 숏폼 영상, 채널별 홍보문과 피칭 텍스트를 완성합니다.</a:t>
             </a:r>
           </a:p>
           <a:p>
@@ -1533,7 +1533,7 @@
           </a:p>
           <a:p>
             <a:r>
-              <a:t>저희 5명은 기획/UI, 백엔드/AI, 프론트, 영상/이미지 워크플로우, QA/운영으로 역할을 엄격히 분담했습니다.</a:t>
+              <a:t>저희 5명은 기획/프론트엔드, AI/백엔드 코어 개발과 함께 서비스 정책·동의서 설계, 유통사 실무 규격 조사, 테스트 음원 수집 및 사용성 검증으로 역할을 전문적으로 분담했습니다.</a:t>
             </a:r>
           </a:p>
           <a:p>
@@ -1543,7 +1543,7 @@
           </a:p>
           <a:p>
             <a:r>
-              <a:t>테스트 과정에서 쏟아진 50여 건의 피드백을 이슈로 등록하고 빠르게 조율하며 하나의 완성도 높은 제품으로 연결했습니다.”</a:t>
+              <a:t>테스트 과정에서 수렴된 피드백을 신속하게 조율하며 완성도 높은 제품으로 완성했습니다.”</a:t>
             </a:r>
           </a:p>
         </p:txBody>
@@ -4964,7 +4964,7 @@
               </a:defRPr>
             </a:pPr>
             <a:r>
-              <a:t>• [프론트엔드 URL] Vercel CDN 배포 완료</a:t>
+              <a:t>• [프론트엔드 URL] https://codyssey-m2-1.vercel.app</a:t>
             </a:r>
           </a:p>
           <a:p>
@@ -6089,7 +6089,7 @@
               </a:defRPr>
             </a:pPr>
             <a:r>
-              <a:t>• 서비스 링크: Vercel 배포 URL  |  코드 저장소: GitHub (github.com/davidchoi0507/Codyssey_M2-1)</a:t>
+              <a:t>• 서비스 링크: https://codyssey-m2-1.vercel.app  |  코드 저장소: github.com/davidchoi0507/Codyssey_M2-1</a:t>
             </a:r>
           </a:p>
         </p:txBody>
@@ -7990,7 +7990,7 @@
               </a:defRPr>
             </a:pPr>
             <a:r>
-              <a:t>• 프레임워크: FastAPI (Python 3.10 비동기)</a:t>
+              <a:t>• 프레임워크: FastAPI (Python 3.12 비동기)</a:t>
             </a:r>
           </a:p>
           <a:p>
@@ -9093,55 +9093,71 @@
               </a:defRPr>
             </a:pPr>
             <a:r>
-              <a:t>3. 카피라이터 &amp; 피칭 에이전트</a:t>
-            </a:r>
-          </a:p>
-          <a:p>
-            <a:pPr>
-              <a:spcAft>
-                <a:spcPts val="350"/>
-              </a:spcAft>
-              <a:defRPr sz="1100">
-                <a:solidFill>
-                  <a:srgbClr val="0F172A"/>
-                </a:solidFill>
-                <a:latin typeface="Pretendard"/>
-              </a:defRPr>
-            </a:pPr>
-            <a:r>
-              <a:t>• 승인된 콘셉트와 곡 소개를 바탕으로 홍보 텍스트 생성</a:t>
-            </a:r>
-          </a:p>
-          <a:p>
-            <a:pPr>
-              <a:spcAft>
-                <a:spcPts val="350"/>
-              </a:spcAft>
-              <a:defRPr sz="1100">
-                <a:solidFill>
-                  <a:srgbClr val="0F172A"/>
-                </a:solidFill>
-                <a:latin typeface="Pretendard"/>
-              </a:defRPr>
-            </a:pPr>
-            <a:r>
-              <a:t>• 인스타그램, 틱톡, 유튜브 채널별 최적화 카피</a:t>
-            </a:r>
-          </a:p>
-          <a:p>
-            <a:pPr>
-              <a:spcAft>
-                <a:spcPts val="350"/>
-              </a:spcAft>
-              <a:defRPr sz="1100">
-                <a:solidFill>
-                  <a:srgbClr val="0F172A"/>
-                </a:solidFill>
-                <a:latin typeface="Pretendard"/>
-              </a:defRPr>
-            </a:pPr>
-            <a:r>
-              <a:t>• 유통사 및 음악 웹진 피칭용 이메일 초안 작성</a:t>
+              <a:t>3. 카피 · 피칭 · 에디토리얼 (총 5종)</a:t>
+            </a:r>
+          </a:p>
+          <a:p>
+            <a:pPr>
+              <a:spcAft>
+                <a:spcPts val="350"/>
+              </a:spcAft>
+              <a:defRPr sz="1100">
+                <a:solidFill>
+                  <a:srgbClr val="0F172A"/>
+                </a:solidFill>
+                <a:latin typeface="Pretendard"/>
+              </a:defRPr>
+            </a:pPr>
+            <a:r>
+              <a:t>• 승인된 콘셉트와 곡 소개를 바탕으로 텍스트 자동화</a:t>
+            </a:r>
+          </a:p>
+          <a:p>
+            <a:pPr>
+              <a:spcAft>
+                <a:spcPts val="350"/>
+              </a:spcAft>
+              <a:defRPr sz="1100">
+                <a:solidFill>
+                  <a:srgbClr val="0F172A"/>
+                </a:solidFill>
+                <a:latin typeface="Pretendard"/>
+              </a:defRPr>
+            </a:pPr>
+            <a:r>
+              <a:t>• [카피라이터] 인스타·틱톡·스레드·X 맞춤 홍보 카피</a:t>
+            </a:r>
+          </a:p>
+          <a:p>
+            <a:pPr>
+              <a:spcAft>
+                <a:spcPts val="350"/>
+              </a:spcAft>
+              <a:defRPr sz="1100">
+                <a:solidFill>
+                  <a:srgbClr val="0F172A"/>
+                </a:solidFill>
+                <a:latin typeface="Pretendard"/>
+              </a:defRPr>
+            </a:pPr>
+            <a:r>
+              <a:t>• [피칭 &amp; 에디토리얼] 영/한 피칭 메일 및 Spotify 피칭 문구</a:t>
+            </a:r>
+          </a:p>
+          <a:p>
+            <a:pPr>
+              <a:spcAft>
+                <a:spcPts val="350"/>
+              </a:spcAft>
+              <a:defRPr sz="1100">
+                <a:solidFill>
+                  <a:srgbClr val="0F172A"/>
+                </a:solidFill>
+                <a:latin typeface="Pretendard"/>
+              </a:defRPr>
+            </a:pPr>
+            <a:r>
+              <a:t>• 5종 에이전트가 단일 A&amp;R 콘셉트를 공유하여 일관성 유지</a:t>
             </a:r>
           </a:p>
         </p:txBody>
@@ -9896,10 +9912,10 @@
                 <a:tableStyleId>{5C22544A-7EE6-4342-B048-85BDC9FD1C3A}</a:tableStyleId>
               </a:tblPr>
               <a:tblGrid>
-                <a:gridCol w="1463040"/>
-                <a:gridCol w="2103120"/>
-                <a:gridCol w="4389120"/>
-                <a:gridCol w="2773375"/>
+                <a:gridCol w="1371600"/>
+                <a:gridCol w="2194560"/>
+                <a:gridCol w="4663440"/>
+                <a:gridCol w="2499055"/>
               </a:tblGrid>
               <a:tr h="487680">
                 <a:tc>
@@ -9964,7 +9980,7 @@
                         </a:defRPr>
                       </a:pPr>
                       <a:r>
-                        <a:t>세부 담당 업무</a:t>
+                        <a:t>세부 담당 업무 및 실기여</a:t>
                       </a:r>
                     </a:p>
                   </a:txBody>
@@ -9988,7 +10004,7 @@
                         </a:defRPr>
                       </a:pPr>
                       <a:r>
-                        <a:t>대표 산출물</a:t>
+                        <a:t>주요 산출물</a:t>
                       </a:r>
                     </a:p>
                   </a:txBody>
@@ -10014,7 +10030,7 @@
                         </a:defRPr>
                       </a:pPr>
                       <a:r>
-                        <a:t>팀장 (본인)</a:t>
+                        <a:t>팀장 (David)</a:t>
                       </a:r>
                     </a:p>
                   </a:txBody>
@@ -10038,7 +10054,7 @@
                         </a:defRPr>
                       </a:pPr>
                       <a:r>
-                        <a:t>Product Lead &amp; UI/UX</a:t>
+                        <a:t>Product Lead &amp; Frontend</a:t>
                       </a:r>
                     </a:p>
                   </a:txBody>
@@ -10062,7 +10078,7 @@
                         </a:defRPr>
                       </a:pPr>
                       <a:r>
-                        <a:t>발매로 기획 총괄, UI 디자인 시스템 구축, 프론트 마크업</a:t>
+                        <a:t>발매로 기획 총괄, 4단계 UX 설계, React 프론트엔드 UI 구현 및 최적화</a:t>
                       </a:r>
                     </a:p>
                   </a:txBody>
@@ -10086,7 +10102,7 @@
                         </a:defRPr>
                       </a:pPr>
                       <a:r>
-                        <a:t>Figma 원본, 프론트 코어, 발표자료</a:t>
+                        <a:t>React UI 코드, 발표 자료</a:t>
                       </a:r>
                     </a:p>
                   </a:txBody>
@@ -10112,7 +10128,7 @@
                         </a:defRPr>
                       </a:pPr>
                       <a:r>
-                        <a:t>팀원 1</a:t>
+                        <a:t>원일</a:t>
                       </a:r>
                     </a:p>
                   </a:txBody>
@@ -10136,7 +10152,7 @@
                         </a:defRPr>
                       </a:pPr>
                       <a:r>
-                        <a:t>Tech Lead &amp; AI/Backend</a:t>
+                        <a:t>Tech Lead &amp; AI / Backend</a:t>
                       </a:r>
                     </a:p>
                   </a:txBody>
@@ -10160,7 +10176,7 @@
                         </a:defRPr>
                       </a:pPr>
                       <a:r>
-                        <a:t>FastAPI 비동기 아키텍처, librosa + Gemini 오디오 엔진</a:t>
+                        <a:t>FastAPI 서버 전체, librosa+Gemini 오디오 엔진, LangChain 5종, 유통사 검사</a:t>
                       </a:r>
                     </a:p>
                   </a:txBody>
@@ -10184,7 +10200,7 @@
                         </a:defRPr>
                       </a:pPr>
                       <a:r>
-                        <a:t>백엔드 API, 오디오 파이프라인</a:t>
+                        <a:t>백엔드 API, AI 파이프라인, 제출문서 5종</a:t>
                       </a:r>
                     </a:p>
                   </a:txBody>
@@ -10210,7 +10226,7 @@
                         </a:defRPr>
                       </a:pPr>
                       <a:r>
-                        <a:t>팀원 2</a:t>
+                        <a:t>이은희</a:t>
                       </a:r>
                     </a:p>
                   </a:txBody>
@@ -10234,7 +10250,7 @@
                         </a:defRPr>
                       </a:pPr>
                       <a:r>
-                        <a:t>Frontend Lead</a:t>
+                        <a:t>Service Policy &amp; UX Research</a:t>
                       </a:r>
                     </a:p>
                   </a:txBody>
@@ -10258,7 +10274,7 @@
                         </a:defRPr>
                       </a:pPr>
                       <a:r>
-                        <a:t>React 반응형 UI, 인라인 에디터, 모바일 가독성 최적화</a:t>
+                        <a:t>서비스 이용약관 및 개인정보 동의서(v1.2~1.6) 기획, 데이터 파기 규정 수립, 10/16 피드백</a:t>
                       </a:r>
                     </a:p>
                   </a:txBody>
@@ -10282,7 +10298,7 @@
                         </a:defRPr>
                       </a:pPr>
                       <a:r>
-                        <a:t>React 컴포넌트, 인터랙션 코드</a:t>
+                        <a:t>개인정보 동의서(v1.6), 개선안 리포트</a:t>
                       </a:r>
                     </a:p>
                   </a:txBody>
@@ -10308,7 +10324,7 @@
                         </a:defRPr>
                       </a:pPr>
                       <a:r>
-                        <a:t>팀원 3</a:t>
+                        <a:t>신미영</a:t>
                       </a:r>
                     </a:p>
                   </a:txBody>
@@ -10332,7 +10348,7 @@
                         </a:defRPr>
                       </a:pPr>
                       <a:r>
-                        <a:t>AI Workflow Lead</a:t>
+                        <a:t>Industry Research &amp; QA</a:t>
                       </a:r>
                     </a:p>
                   </a:txBody>
@@ -10356,7 +10372,7 @@
                         </a:defRPr>
                       </a:pPr>
                       <a:r>
-                        <a:t>gpt-image-2 이미지 연동, ffmpeg 비디오 렌더러 구축</a:t>
+                        <a:t>유통사(DistroKid/뮤즈플랫폼) 규격 조사, 실음원 테스트 진행 및 개선안 리포트(33건 도출)</a:t>
                       </a:r>
                     </a:p>
                   </a:txBody>
@@ -10380,7 +10396,7 @@
                         </a:defRPr>
                       </a:pPr>
                       <a:r>
-                        <a:t>이미지/영상 파이프라인, 프롬프트 로그</a:t>
+                        <a:t>유통사 조사서, 실음원 테스트 리포트</a:t>
                       </a:r>
                     </a:p>
                   </a:txBody>
@@ -10406,7 +10422,7 @@
                         </a:defRPr>
                       </a:pPr>
                       <a:r>
-                        <a:t>팀원 4</a:t>
+                        <a:t>이지은</a:t>
                       </a:r>
                     </a:p>
                   </a:txBody>
@@ -10430,7 +10446,7 @@
                         </a:defRPr>
                       </a:pPr>
                       <a:r>
-                        <a:t>QA &amp; Operations</a:t>
+                        <a:t>Audio Dataset &amp; Usability</a:t>
                       </a:r>
                     </a:p>
                   </a:txBody>
@@ -10454,7 +10470,7 @@
                         </a:defRPr>
                       </a:pPr>
                       <a:r>
-                        <a:t>실사용자 5인 테스트 총괄, 피드백 분석 보고서, 이슈 트래킹</a:t>
+                        <a:t>장르별 테스트용 음원 데이터 수집·정비, 실사용자 테스트 진행 지원 및 만족도 설문 집계</a:t>
                       </a:r>
                     </a:p>
                   </a:txBody>
@@ -10478,7 +10494,7 @@
                         </a:defRPr>
                       </a:pPr>
                       <a:r>
-                        <a:t>테스트 결과 보고서, QA 이슈보드</a:t>
+                        <a:t>테스트 음원셋, 설문 집계 데이터</a:t>
                       </a:r>
                     </a:p>
                   </a:txBody>
@@ -10572,7 +10588,7 @@
               </a:defRPr>
             </a:pPr>
             <a:r>
-              <a:t>• 이슈 트래킹: 50여 건의 사용자 피드백을 GitHub Issues로 등록하고 화면/백엔드 태그로 분담 처리</a:t>
+              <a:t>• 피드백 반영: 실사용자 테스트에서 수렴된 개선 의견을 화면/백엔드 태그로 분담하여 신속하게 처리</a:t>
             </a:r>
           </a:p>
         </p:txBody>

--- a/balmaero_presentation.pptx
+++ b/balmaero_presentation.pptx
@@ -5163,7 +5163,7 @@
               </a:defRPr>
             </a:pPr>
             <a:r>
-              <a:t>   - 릴리즈 팩 내 모든 이미지 및 텍스트에 'AI Generated' 메타데이터 표기</a:t>
+              <a:t>   - ZIP 릴리즈 팩과 결과물에 사용 AI 모델 표기, 커뮤니티 곡 AI 활용 여부 표시</a:t>
             </a:r>
           </a:p>
           <a:p>
@@ -10372,7 +10372,7 @@
                         </a:defRPr>
                       </a:pPr>
                       <a:r>
-                        <a:t>유통사(DistroKid/뮤즈플랫폼) 규격 조사, 실음원 테스트 진행 및 개선안 리포트(33건 도출)</a:t>
+                        <a:t>유통사(DistroKid/뮤즈플랫폼) 규격 조사, 실음원 테스트 진행 및 개선안 리포트(10/16 10건 + 개선안 8건)</a:t>
                       </a:r>
                     </a:p>
                   </a:txBody>
@@ -10422,7 +10422,7 @@
                         </a:defRPr>
                       </a:pPr>
                       <a:r>
-                        <a:t>이지은</a:t>
+                        <a:t>김지은</a:t>
                       </a:r>
                     </a:p>
                   </a:txBody>

--- a/balmaero_presentation.pptx
+++ b/balmaero_presentation.pptx
@@ -10128,7 +10128,7 @@
                         </a:defRPr>
                       </a:pPr>
                       <a:r>
-                        <a:t>원일</a:t>
+                        <a:t>이원일</a:t>
                       </a:r>
                     </a:p>
                   </a:txBody>

--- a/balmaero_presentation.pptx
+++ b/balmaero_presentation.pptx
@@ -10030,7 +10030,7 @@
                         </a:defRPr>
                       </a:pPr>
                       <a:r>
-                        <a:t>팀장 (David)</a:t>
+                        <a:t>최다인 (팀장)</a:t>
                       </a:r>
                     </a:p>
                   </a:txBody>
